--- a/assets/pptx/catalog-129.pptx
+++ b/assets/pptx/catalog-129.pptx
@@ -3247,7 +3247,7 @@
                 <a:ea typeface="Ebrima"/>
                 <a:cs typeface="Ebrima"/>
               </a:rPr>
-              <a:t>እርዳኝ (3) እርዳኝ(3)</a:t>
+              <a:t>እርዳኝ 3 እርዳኝ3</a:t>
             </a:r>
           </a:p>
           <a:p>
@@ -3301,7 +3301,7 @@
                 <a:ea typeface="Ebrima"/>
                 <a:cs typeface="Ebrima"/>
               </a:rPr>
-              <a:t>'ባክህ እርዳኝ/ እየሱስ እርዳኝ (2)</a:t>
+              <a:t>'ባክህ እርዳኝ/ እየሱስ እርዳኝ 2</a:t>
             </a:r>
           </a:p>
         </p:txBody>
@@ -3422,7 +3422,7 @@
                 <a:ea typeface="Ebrima"/>
                 <a:cs typeface="Ebrima"/>
               </a:rPr>
-              <a:t>ኣለ ኣሁንም ያስጋዊ ማንነቴ (2)</a:t>
+              <a:t>ኣለ ኣሁንም ያስጋዊ ማንነቴ 2</a:t>
             </a:r>
           </a:p>
         </p:txBody>
@@ -3543,7 +3543,7 @@
                 <a:ea typeface="Ebrima"/>
                 <a:cs typeface="Ebrima"/>
               </a:rPr>
-              <a:t>እርዳኝ ልበልህ ልምበርከክ እና(2)</a:t>
+              <a:t>እርዳኝ ልበልህ ልምበርከክ እና2</a:t>
             </a:r>
           </a:p>
         </p:txBody>
@@ -3610,7 +3610,7 @@
                 <a:ea typeface="Ebrima"/>
                 <a:cs typeface="Ebrima"/>
               </a:rPr>
-              <a:t>እርዳኝ (3) እርዳኝ(3)</a:t>
+              <a:t>እርዳኝ 3 እርዳኝ3</a:t>
             </a:r>
           </a:p>
           <a:p>
@@ -3664,7 +3664,7 @@
                 <a:ea typeface="Ebrima"/>
                 <a:cs typeface="Ebrima"/>
               </a:rPr>
-              <a:t>'ባክህ እርዳኝ/ እየሱስ እርዳኝ (2)</a:t>
+              <a:t>'ባክህ እርዳኝ/ እየሱስ እርዳኝ 2</a:t>
             </a:r>
           </a:p>
         </p:txBody>
@@ -3785,7 +3785,7 @@
                 <a:ea typeface="Ebrima"/>
                 <a:cs typeface="Ebrima"/>
               </a:rPr>
-              <a:t>ኣለ ኣሁንም ያስጋዊ ማንነቴ (2)</a:t>
+              <a:t>ኣለ ኣሁንም ያስጋዊ ማንነቴ 2</a:t>
             </a:r>
           </a:p>
         </p:txBody>
@@ -3906,7 +3906,7 @@
                 <a:ea typeface="Ebrima"/>
                 <a:cs typeface="Ebrima"/>
               </a:rPr>
-              <a:t>ገንዘብህ ልሁን ጌታ እርዳኝና (2)</a:t>
+              <a:t>ገንዘብህ ልሁን ጌታ እርዳኝና 2</a:t>
             </a:r>
           </a:p>
         </p:txBody>
@@ -3973,7 +3973,7 @@
                 <a:ea typeface="Ebrima"/>
                 <a:cs typeface="Ebrima"/>
               </a:rPr>
-              <a:t>እርዳኝ (3) እርዳኝ(3)</a:t>
+              <a:t>እርዳኝ 3 እርዳኝ3</a:t>
             </a:r>
           </a:p>
           <a:p>
@@ -4027,7 +4027,7 @@
                 <a:ea typeface="Ebrima"/>
                 <a:cs typeface="Ebrima"/>
               </a:rPr>
-              <a:t>'ባክህ እርዳኝ/ እየሱስ እርዳኝ (2)</a:t>
+              <a:t>'ባክህ እርዳኝ/ እየሱስ እርዳኝ 2</a:t>
             </a:r>
           </a:p>
         </p:txBody>
